--- a/assets/downloads/Session-2-Your-Values-Under-Pressure.pptx
+++ b/assets/downloads/Session-2-Your-Values-Under-Pressure.pptx
@@ -5593,7 +5593,7 @@
         <p:spPr>
           <a:xfrm>
             <a:off x="731520" y="2560320"/>
-            <a:ext cx="10515600" cy="2743200"/>
+            <a:ext cx="10515600" cy="2011680"/>
           </a:xfrm>
           <a:prstGeom prst="rect">
             <a:avLst/>
@@ -5616,13 +5616,136 @@
             </a:pPr>
             <a:r>
               <a:t>4 scenarios appear on screen one at a time. For each, vote live: which value would you sacrifice first? Show results. Where the room splits, that's the discussion.</a:t>
+            </a:r>
+          </a:p>
+        </p:txBody>
+      </p:sp>
+      <p:sp>
+        <p:nvSpPr>
+          <p:cNvPr id="7" name="TextBox 6"/>
+          <p:cNvSpPr txBox="1"/>
+          <p:nvPr/>
+        </p:nvSpPr>
+        <p:spPr>
+          <a:xfrm>
+            <a:off x="731520" y="4663440"/>
+            <a:ext cx="10515600" cy="320040"/>
+          </a:xfrm>
+          <a:prstGeom prst="rect">
+            <a:avLst/>
+          </a:prstGeom>
+          <a:noFill/>
+        </p:spPr>
+        <p:txBody>
+          <a:bodyPr wrap="square" lIns="0" rIns="0">
+            <a:spAutoFit/>
+          </a:bodyPr>
+          <a:lstStyle/>
+          <a:p>
+            <a:pPr algn="l">
+              <a:defRPr sz="1100" b="1">
+                <a:solidFill>
+                  <a:srgbClr val="7B61FF"/>
+                </a:solidFill>
+                <a:latin typeface="Calibri"/>
+              </a:defRPr>
+            </a:pPr>
+            <a:r>
+              <a:t>PROMPTS</a:t>
+            </a:r>
+          </a:p>
+        </p:txBody>
+      </p:sp>
+      <p:sp>
+        <p:nvSpPr>
+          <p:cNvPr id="8" name="TextBox 7"/>
+          <p:cNvSpPr txBox="1"/>
+          <p:nvPr/>
+        </p:nvSpPr>
+        <p:spPr>
+          <a:xfrm>
+            <a:off x="731520" y="4983480"/>
+            <a:ext cx="10515600" cy="2103120"/>
+          </a:xfrm>
+          <a:prstGeom prst="rect">
+            <a:avLst/>
+          </a:prstGeom>
+          <a:noFill/>
+        </p:spPr>
+        <p:txBody>
+          <a:bodyPr wrap="square" lIns="0">
+            <a:spAutoFit/>
+          </a:bodyPr>
+          <a:lstStyle/>
+          <a:p>
+            <a:pPr>
+              <a:spcAft>
+                <a:spcPts val="800"/>
+              </a:spcAft>
+              <a:defRPr sz="1300">
+                <a:solidFill>
+                  <a:srgbClr val="B8B8D0"/>
+                </a:solidFill>
+                <a:latin typeface="Calibri"/>
+              </a:defRPr>
+            </a:pPr>
+            <a:r>
+              <a:t>•  Half the group isn't engaging. You have 5 minutes left. Do you push on or change the plan?</a:t>
+            </a:r>
+          </a:p>
+          <a:p>
+            <a:pPr>
+              <a:spcAft>
+                <a:spcPts val="800"/>
+              </a:spcAft>
+              <a:defRPr sz="1300">
+                <a:solidFill>
+                  <a:srgbClr val="B8B8D0"/>
+                </a:solidFill>
+                <a:latin typeface="Calibri"/>
+              </a:defRPr>
+            </a:pPr>
+            <a:r>
+              <a:t>•  A young person says something offensive in the chat. Do you delete it, address it publicly, or message them privately?</a:t>
+            </a:r>
+          </a:p>
+          <a:p>
+            <a:pPr>
+              <a:spcAft>
+                <a:spcPts val="800"/>
+              </a:spcAft>
+              <a:defRPr sz="1300">
+                <a:solidFill>
+                  <a:srgbClr val="B8B8D0"/>
+                </a:solidFill>
+                <a:latin typeface="Calibri"/>
+              </a:defRPr>
+            </a:pPr>
+            <a:r>
+              <a:t>•  The Wi-Fi goes down mid-session. You have 20 young people looking at you. What do you do?</a:t>
+            </a:r>
+          </a:p>
+          <a:p>
+            <a:pPr>
+              <a:spcAft>
+                <a:spcPts val="800"/>
+              </a:spcAft>
+              <a:defRPr sz="1300">
+                <a:solidFill>
+                  <a:srgbClr val="B8B8D0"/>
+                </a:solidFill>
+                <a:latin typeface="Calibri"/>
+              </a:defRPr>
+            </a:pPr>
+            <a:r>
+              <a:t>•  Two participants are dominating. Others have gone silent. Do you intervene or let it play out?</a:t>
             </a:r>
           </a:p>
         </p:txBody>
       </p:sp>
       <p:pic>
         <p:nvPicPr>
-          <p:cNvPr id="7" name="Picture 6" descr="logo.png"/>
+          <p:cNvPr id="9" name="Picture 8" descr="logo.png"/>
           <p:cNvPicPr>
             <a:picLocks noChangeAspect="1"/>
           </p:cNvPicPr>
@@ -5646,7 +5769,7 @@
       </p:pic>
       <p:sp>
         <p:nvSpPr>
-          <p:cNvPr id="8" name="TextBox 7"/>
+          <p:cNvPr id="10" name="TextBox 9"/>
           <p:cNvSpPr txBox="1"/>
           <p:nvPr/>
         </p:nvSpPr>
@@ -7897,7 +8020,7 @@
         <p:spPr>
           <a:xfrm>
             <a:off x="731520" y="2103120"/>
-            <a:ext cx="10515600" cy="2743200"/>
+            <a:ext cx="10515600" cy="2011680"/>
           </a:xfrm>
           <a:prstGeom prst="rect">
             <a:avLst/>
@@ -7919,14 +8042,169 @@
               </a:defRPr>
             </a:pPr>
             <a:r>
-              <a:t>4 chairs in the middle of the room. Volunteers sit and discuss: 'When is it OK to compromise your values in youth work?' Anyone can tap a shoulder to swap in. Everyone else listens in silence.</a:t>
+              <a:t>4 chairs in the middle of the room. Volunteers sit and discuss. Anyone can tap a shoulder to swap in. Everyone else listens in silence. Use the primers below to get going — pick whichever one hits hardest, or move through them as the conversation opens up.</a:t>
+            </a:r>
+          </a:p>
+        </p:txBody>
+      </p:sp>
+      <p:sp>
+        <p:nvSpPr>
+          <p:cNvPr id="6" name="TextBox 5"/>
+          <p:cNvSpPr txBox="1"/>
+          <p:nvPr/>
+        </p:nvSpPr>
+        <p:spPr>
+          <a:xfrm>
+            <a:off x="731520" y="4206240"/>
+            <a:ext cx="10515600" cy="320040"/>
+          </a:xfrm>
+          <a:prstGeom prst="rect">
+            <a:avLst/>
+          </a:prstGeom>
+          <a:noFill/>
+        </p:spPr>
+        <p:txBody>
+          <a:bodyPr wrap="square" lIns="0" rIns="0">
+            <a:spAutoFit/>
+          </a:bodyPr>
+          <a:lstStyle/>
+          <a:p>
+            <a:pPr algn="l">
+              <a:defRPr sz="1100" b="1">
+                <a:solidFill>
+                  <a:srgbClr val="FFB800"/>
+                </a:solidFill>
+                <a:latin typeface="Calibri"/>
+              </a:defRPr>
+            </a:pPr>
+            <a:r>
+              <a:t>PROMPTS</a:t>
+            </a:r>
+          </a:p>
+        </p:txBody>
+      </p:sp>
+      <p:sp>
+        <p:nvSpPr>
+          <p:cNvPr id="7" name="TextBox 6"/>
+          <p:cNvSpPr txBox="1"/>
+          <p:nvPr/>
+        </p:nvSpPr>
+        <p:spPr>
+          <a:xfrm>
+            <a:off x="731520" y="4526280"/>
+            <a:ext cx="10515600" cy="2103120"/>
+          </a:xfrm>
+          <a:prstGeom prst="rect">
+            <a:avLst/>
+          </a:prstGeom>
+          <a:noFill/>
+        </p:spPr>
+        <p:txBody>
+          <a:bodyPr wrap="square" lIns="0">
+            <a:spAutoFit/>
+          </a:bodyPr>
+          <a:lstStyle/>
+          <a:p>
+            <a:pPr>
+              <a:spcAft>
+                <a:spcPts val="800"/>
+              </a:spcAft>
+              <a:defRPr sz="1300">
+                <a:solidFill>
+                  <a:srgbClr val="B8B8D0"/>
+                </a:solidFill>
+                <a:latin typeface="Calibri"/>
+              </a:defRPr>
+            </a:pPr>
+            <a:r>
+              <a:t>•  When is it OK to compromise your values in youth work — and when isn't it?</a:t>
+            </a:r>
+          </a:p>
+          <a:p>
+            <a:pPr>
+              <a:spcAft>
+                <a:spcPts val="800"/>
+              </a:spcAft>
+              <a:defRPr sz="1300">
+                <a:solidFill>
+                  <a:srgbClr val="B8B8D0"/>
+                </a:solidFill>
+                <a:latin typeface="Calibri"/>
+              </a:defRPr>
+            </a:pPr>
+            <a:r>
+              <a:t>•  Name a time you stayed silent when you should have spoken up. What stopped you?</a:t>
+            </a:r>
+          </a:p>
+          <a:p>
+            <a:pPr>
+              <a:spcAft>
+                <a:spcPts val="800"/>
+              </a:spcAft>
+              <a:defRPr sz="1300">
+                <a:solidFill>
+                  <a:srgbClr val="B8B8D0"/>
+                </a:solidFill>
+                <a:latin typeface="Calibri"/>
+              </a:defRPr>
+            </a:pPr>
+            <a:r>
+              <a:t>•  Have you ever picked the tool that was easy over the tool that was right? What happened?</a:t>
+            </a:r>
+          </a:p>
+          <a:p>
+            <a:pPr>
+              <a:spcAft>
+                <a:spcPts val="800"/>
+              </a:spcAft>
+              <a:defRPr sz="1300">
+                <a:solidFill>
+                  <a:srgbClr val="B8B8D0"/>
+                </a:solidFill>
+                <a:latin typeface="Calibri"/>
+              </a:defRPr>
+            </a:pPr>
+            <a:r>
+              <a:t>•  If a young person asked you 'do you actually believe this?' about something you're running — could you answer honestly?</a:t>
+            </a:r>
+          </a:p>
+          <a:p>
+            <a:pPr>
+              <a:spcAft>
+                <a:spcPts val="800"/>
+              </a:spcAft>
+              <a:defRPr sz="1300">
+                <a:solidFill>
+                  <a:srgbClr val="B8B8D0"/>
+                </a:solidFill>
+                <a:latin typeface="Calibri"/>
+              </a:defRPr>
+            </a:pPr>
+            <a:r>
+              <a:t>•  What's a value your org says loudly that you've quietly stopped believing in?</a:t>
+            </a:r>
+          </a:p>
+          <a:p>
+            <a:pPr>
+              <a:spcAft>
+                <a:spcPts val="800"/>
+              </a:spcAft>
+              <a:defRPr sz="1300">
+                <a:solidFill>
+                  <a:srgbClr val="B8B8D0"/>
+                </a:solidFill>
+                <a:latin typeface="Calibri"/>
+              </a:defRPr>
+            </a:pPr>
+            <a:r>
+              <a:t>•  When your values clash with your manager's, whose win — and why?</a:t>
             </a:r>
           </a:p>
         </p:txBody>
       </p:sp>
       <p:pic>
         <p:nvPicPr>
-          <p:cNvPr id="6" name="Picture 5" descr="logo.png"/>
+          <p:cNvPr id="8" name="Picture 7" descr="logo.png"/>
           <p:cNvPicPr>
             <a:picLocks noChangeAspect="1"/>
           </p:cNvPicPr>
@@ -7950,7 +8228,7 @@
       </p:pic>
       <p:sp>
         <p:nvSpPr>
-          <p:cNvPr id="7" name="TextBox 6"/>
+          <p:cNvPr id="9" name="TextBox 8"/>
           <p:cNvSpPr txBox="1"/>
           <p:nvPr/>
         </p:nvSpPr>

--- a/assets/downloads/Session-2-Your-Values-Under-Pressure.pptx
+++ b/assets/downloads/Session-2-Your-Values-Under-Pressure.pptx
@@ -9703,7 +9703,7 @@
               </a:defRPr>
             </a:pPr>
             <a:r>
-              <a:t>"What do you actually believe about youth work — and does it hold up when things go wrong?"</a:t>
+              <a:t>"What are the hidden and explicit values of the digital youth work curriculum?"</a:t>
             </a:r>
           </a:p>
         </p:txBody>
@@ -9739,7 +9739,7 @@
               </a:defRPr>
             </a:pPr>
             <a:r>
-              <a:t>Everyone has values they say they hold. This session tests whether those values show up in what you actually build and how you react when things don't go to plan.</a:t>
+              <a:t>Every activity you run teaches values — some of them you meant to put there, some of them you didn't. This session surfaces both: the values your practice says out loud, and the values it quietly shows through design, default settings, and what you do under pressure.</a:t>
             </a:r>
           </a:p>
         </p:txBody>

--- a/assets/downloads/Session-2-Your-Values-Under-Pressure.pptx
+++ b/assets/downloads/Session-2-Your-Values-Under-Pressure.pptx
@@ -5,40 +5,40 @@
     <p:sldMasterId id="2147483648" r:id="rId1"/>
   </p:sldMasterIdLst>
   <p:sldIdLst>
-    <p:sldId id="256" r:id="rId7"/>
-    <p:sldId id="257" r:id="rId8"/>
-    <p:sldId id="258" r:id="rId9"/>
-    <p:sldId id="259" r:id="rId10"/>
-    <p:sldId id="260" r:id="rId11"/>
-    <p:sldId id="261" r:id="rId12"/>
-    <p:sldId id="262" r:id="rId13"/>
-    <p:sldId id="263" r:id="rId14"/>
-    <p:sldId id="264" r:id="rId15"/>
-    <p:sldId id="265" r:id="rId16"/>
-    <p:sldId id="266" r:id="rId17"/>
-    <p:sldId id="267" r:id="rId18"/>
-    <p:sldId id="268" r:id="rId19"/>
-    <p:sldId id="269" r:id="rId20"/>
-    <p:sldId id="270" r:id="rId21"/>
-    <p:sldId id="271" r:id="rId22"/>
-    <p:sldId id="272" r:id="rId23"/>
-    <p:sldId id="273" r:id="rId24"/>
-    <p:sldId id="274" r:id="rId25"/>
-    <p:sldId id="275" r:id="rId26"/>
-    <p:sldId id="276" r:id="rId27"/>
-    <p:sldId id="277" r:id="rId28"/>
-    <p:sldId id="278" r:id="rId29"/>
-    <p:sldId id="279" r:id="rId30"/>
-    <p:sldId id="280" r:id="rId31"/>
-    <p:sldId id="281" r:id="rId32"/>
-    <p:sldId id="282" r:id="rId33"/>
-    <p:sldId id="283" r:id="rId34"/>
-    <p:sldId id="284" r:id="rId35"/>
-    <p:sldId id="285" r:id="rId36"/>
-    <p:sldId id="286" r:id="rId37"/>
-    <p:sldId id="287" r:id="rId38"/>
+    <p:sldId id="256" r:id="rId2"/>
+    <p:sldId id="257" r:id="rId3"/>
+    <p:sldId id="258" r:id="rId4"/>
+    <p:sldId id="259" r:id="rId5"/>
+    <p:sldId id="260" r:id="rId6"/>
+    <p:sldId id="261" r:id="rId7"/>
+    <p:sldId id="262" r:id="rId8"/>
+    <p:sldId id="263" r:id="rId9"/>
+    <p:sldId id="264" r:id="rId10"/>
+    <p:sldId id="265" r:id="rId11"/>
+    <p:sldId id="266" r:id="rId12"/>
+    <p:sldId id="267" r:id="rId13"/>
+    <p:sldId id="268" r:id="rId14"/>
+    <p:sldId id="269" r:id="rId15"/>
+    <p:sldId id="270" r:id="rId16"/>
+    <p:sldId id="271" r:id="rId17"/>
+    <p:sldId id="272" r:id="rId18"/>
+    <p:sldId id="273" r:id="rId19"/>
+    <p:sldId id="274" r:id="rId20"/>
+    <p:sldId id="275" r:id="rId21"/>
+    <p:sldId id="276" r:id="rId22"/>
+    <p:sldId id="277" r:id="rId23"/>
+    <p:sldId id="278" r:id="rId24"/>
+    <p:sldId id="279" r:id="rId25"/>
+    <p:sldId id="280" r:id="rId26"/>
+    <p:sldId id="281" r:id="rId27"/>
+    <p:sldId id="282" r:id="rId28"/>
+    <p:sldId id="283" r:id="rId29"/>
+    <p:sldId id="284" r:id="rId30"/>
+    <p:sldId id="285" r:id="rId31"/>
+    <p:sldId id="286" r:id="rId32"/>
+    <p:sldId id="287" r:id="rId33"/>
   </p:sldIdLst>
-  <p:sldSz cx="12191695" cy="6858000" type="screen4x3"/>
+  <p:sldSz cx="12192000" cy="6858000"/>
   <p:notesSz cx="6858000" cy="9144000"/>
   <p:defaultTextStyle>
     <a:defPPr>
@@ -135,6 +135,22 @@
       </a:defRPr>
     </a:lvl9pPr>
   </p:defaultTextStyle>
+  <p:extLst>
+    <p:ext uri="{EFAFB233-063F-42B5-8137-9DF3F51BA10A}">
+      <p15:sldGuideLst xmlns:p15="http://schemas.microsoft.com/office/powerpoint/2012/main">
+        <p15:guide id="1" orient="horz" pos="2160">
+          <p15:clr>
+            <a:srgbClr val="A4A3A4"/>
+          </p15:clr>
+        </p15:guide>
+        <p15:guide id="2" pos="2880">
+          <p15:clr>
+            <a:srgbClr val="A4A3A4"/>
+          </p15:clr>
+        </p15:guide>
+      </p15:sldGuideLst>
+    </p:ext>
+  </p:extLst>
 </p:presentation>
 </file>
 
@@ -176,10 +192,9 @@
           <a:lstStyle/>
           <a:p>
             <a:r>
-              <a:rPr lang="en-US" smtClean="0"/>
+              <a:rPr lang="en-US"/>
               <a:t>Click to edit Master title style</a:t>
             </a:r>
-            <a:endParaRPr lang="en-US"/>
           </a:p>
         </p:txBody>
       </p:sp>
@@ -295,10 +310,9 @@
           </a:lstStyle>
           <a:p>
             <a:r>
-              <a:rPr lang="en-US" smtClean="0"/>
+              <a:rPr lang="en-US"/>
               <a:t>Click to edit Master subtitle style</a:t>
             </a:r>
-            <a:endParaRPr lang="en-US"/>
           </a:p>
         </p:txBody>
       </p:sp>
@@ -319,7 +333,7 @@
           <a:p>
             <a:fld id="{5BCAD085-E8A6-8845-BD4E-CB4CCA059FC4}" type="datetimeFigureOut">
               <a:rPr lang="en-US" smtClean="0"/>
-              <a:t>1/27/13</a:t>
+              <a:t>4/16/26</a:t>
             </a:fld>
             <a:endParaRPr lang="en-US"/>
           </a:p>
@@ -413,10 +427,9 @@
           <a:lstStyle/>
           <a:p>
             <a:r>
-              <a:rPr lang="en-US" smtClean="0"/>
+              <a:rPr lang="en-US"/>
               <a:t>Click to edit Master title style</a:t>
             </a:r>
-            <a:endParaRPr lang="en-US"/>
           </a:p>
         </p:txBody>
       </p:sp>
@@ -437,38 +450,37 @@
           <a:p>
             <a:pPr lvl="0"/>
             <a:r>
-              <a:rPr lang="en-US" smtClean="0"/>
+              <a:rPr lang="en-US"/>
               <a:t>Click to edit Master text styles</a:t>
             </a:r>
           </a:p>
           <a:p>
             <a:pPr lvl="1"/>
             <a:r>
-              <a:rPr lang="en-US" smtClean="0"/>
+              <a:rPr lang="en-US"/>
               <a:t>Second level</a:t>
             </a:r>
           </a:p>
           <a:p>
             <a:pPr lvl="2"/>
             <a:r>
-              <a:rPr lang="en-US" smtClean="0"/>
+              <a:rPr lang="en-US"/>
               <a:t>Third level</a:t>
             </a:r>
           </a:p>
           <a:p>
             <a:pPr lvl="3"/>
             <a:r>
-              <a:rPr lang="en-US" smtClean="0"/>
+              <a:rPr lang="en-US"/>
               <a:t>Fourth level</a:t>
             </a:r>
           </a:p>
           <a:p>
             <a:pPr lvl="4"/>
             <a:r>
-              <a:rPr lang="en-US" smtClean="0"/>
+              <a:rPr lang="en-US"/>
               <a:t>Fifth level</a:t>
             </a:r>
-            <a:endParaRPr lang="en-US"/>
           </a:p>
         </p:txBody>
       </p:sp>
@@ -489,7 +501,7 @@
           <a:p>
             <a:fld id="{5BCAD085-E8A6-8845-BD4E-CB4CCA059FC4}" type="datetimeFigureOut">
               <a:rPr lang="en-US" smtClean="0"/>
-              <a:t>1/27/13</a:t>
+              <a:t>4/16/26</a:t>
             </a:fld>
             <a:endParaRPr lang="en-US"/>
           </a:p>
@@ -588,10 +600,9 @@
           <a:lstStyle/>
           <a:p>
             <a:r>
-              <a:rPr lang="en-US" smtClean="0"/>
+              <a:rPr lang="en-US"/>
               <a:t>Click to edit Master title style</a:t>
             </a:r>
-            <a:endParaRPr lang="en-US"/>
           </a:p>
         </p:txBody>
       </p:sp>
@@ -617,38 +628,37 @@
           <a:p>
             <a:pPr lvl="0"/>
             <a:r>
-              <a:rPr lang="en-US" smtClean="0"/>
+              <a:rPr lang="en-US"/>
               <a:t>Click to edit Master text styles</a:t>
             </a:r>
           </a:p>
           <a:p>
             <a:pPr lvl="1"/>
             <a:r>
-              <a:rPr lang="en-US" smtClean="0"/>
+              <a:rPr lang="en-US"/>
               <a:t>Second level</a:t>
             </a:r>
           </a:p>
           <a:p>
             <a:pPr lvl="2"/>
             <a:r>
-              <a:rPr lang="en-US" smtClean="0"/>
+              <a:rPr lang="en-US"/>
               <a:t>Third level</a:t>
             </a:r>
           </a:p>
           <a:p>
             <a:pPr lvl="3"/>
             <a:r>
-              <a:rPr lang="en-US" smtClean="0"/>
+              <a:rPr lang="en-US"/>
               <a:t>Fourth level</a:t>
             </a:r>
           </a:p>
           <a:p>
             <a:pPr lvl="4"/>
             <a:r>
-              <a:rPr lang="en-US" smtClean="0"/>
+              <a:rPr lang="en-US"/>
               <a:t>Fifth level</a:t>
             </a:r>
-            <a:endParaRPr lang="en-US"/>
           </a:p>
         </p:txBody>
       </p:sp>
@@ -669,7 +679,7 @@
           <a:p>
             <a:fld id="{5BCAD085-E8A6-8845-BD4E-CB4CCA059FC4}" type="datetimeFigureOut">
               <a:rPr lang="en-US" smtClean="0"/>
-              <a:t>1/27/13</a:t>
+              <a:t>4/16/26</a:t>
             </a:fld>
             <a:endParaRPr lang="en-US"/>
           </a:p>
@@ -763,10 +773,9 @@
           <a:lstStyle/>
           <a:p>
             <a:r>
-              <a:rPr lang="en-US" smtClean="0"/>
+              <a:rPr lang="en-US"/>
               <a:t>Click to edit Master title style</a:t>
             </a:r>
-            <a:endParaRPr lang="en-US"/>
           </a:p>
         </p:txBody>
       </p:sp>
@@ -787,38 +796,37 @@
           <a:p>
             <a:pPr lvl="0"/>
             <a:r>
-              <a:rPr lang="en-US" smtClean="0"/>
+              <a:rPr lang="en-US"/>
               <a:t>Click to edit Master text styles</a:t>
             </a:r>
           </a:p>
           <a:p>
             <a:pPr lvl="1"/>
             <a:r>
-              <a:rPr lang="en-US" smtClean="0"/>
+              <a:rPr lang="en-US"/>
               <a:t>Second level</a:t>
             </a:r>
           </a:p>
           <a:p>
             <a:pPr lvl="2"/>
             <a:r>
-              <a:rPr lang="en-US" smtClean="0"/>
+              <a:rPr lang="en-US"/>
               <a:t>Third level</a:t>
             </a:r>
           </a:p>
           <a:p>
             <a:pPr lvl="3"/>
             <a:r>
-              <a:rPr lang="en-US" smtClean="0"/>
+              <a:rPr lang="en-US"/>
               <a:t>Fourth level</a:t>
             </a:r>
           </a:p>
           <a:p>
             <a:pPr lvl="4"/>
             <a:r>
-              <a:rPr lang="en-US" smtClean="0"/>
+              <a:rPr lang="en-US"/>
               <a:t>Fifth level</a:t>
             </a:r>
-            <a:endParaRPr lang="en-US"/>
           </a:p>
         </p:txBody>
       </p:sp>
@@ -839,7 +847,7 @@
           <a:p>
             <a:fld id="{5BCAD085-E8A6-8845-BD4E-CB4CCA059FC4}" type="datetimeFigureOut">
               <a:rPr lang="en-US" smtClean="0"/>
-              <a:t>1/27/13</a:t>
+              <a:t>4/16/26</a:t>
             </a:fld>
             <a:endParaRPr lang="en-US"/>
           </a:p>
@@ -942,10 +950,9 @@
           </a:lstStyle>
           <a:p>
             <a:r>
-              <a:rPr lang="en-US" smtClean="0"/>
+              <a:rPr lang="en-US"/>
               <a:t>Click to edit Master title style</a:t>
             </a:r>
-            <a:endParaRPr lang="en-US"/>
           </a:p>
         </p:txBody>
       </p:sp>
@@ -1062,7 +1069,7 @@
           <a:p>
             <a:pPr lvl="0"/>
             <a:r>
-              <a:rPr lang="en-US" smtClean="0"/>
+              <a:rPr lang="en-US"/>
               <a:t>Click to edit Master text styles</a:t>
             </a:r>
           </a:p>
@@ -1085,7 +1092,7 @@
           <a:p>
             <a:fld id="{5BCAD085-E8A6-8845-BD4E-CB4CCA059FC4}" type="datetimeFigureOut">
               <a:rPr lang="en-US" smtClean="0"/>
-              <a:t>1/27/13</a:t>
+              <a:t>4/16/26</a:t>
             </a:fld>
             <a:endParaRPr lang="en-US"/>
           </a:p>
@@ -1179,10 +1186,9 @@
           <a:lstStyle/>
           <a:p>
             <a:r>
-              <a:rPr lang="en-US" smtClean="0"/>
+              <a:rPr lang="en-US"/>
               <a:t>Click to edit Master title style</a:t>
             </a:r>
-            <a:endParaRPr lang="en-US"/>
           </a:p>
         </p:txBody>
       </p:sp>
@@ -1236,38 +1242,37 @@
           <a:p>
             <a:pPr lvl="0"/>
             <a:r>
-              <a:rPr lang="en-US" smtClean="0"/>
+              <a:rPr lang="en-US"/>
               <a:t>Click to edit Master text styles</a:t>
             </a:r>
           </a:p>
           <a:p>
             <a:pPr lvl="1"/>
             <a:r>
-              <a:rPr lang="en-US" smtClean="0"/>
+              <a:rPr lang="en-US"/>
               <a:t>Second level</a:t>
             </a:r>
           </a:p>
           <a:p>
             <a:pPr lvl="2"/>
             <a:r>
-              <a:rPr lang="en-US" smtClean="0"/>
+              <a:rPr lang="en-US"/>
               <a:t>Third level</a:t>
             </a:r>
           </a:p>
           <a:p>
             <a:pPr lvl="3"/>
             <a:r>
-              <a:rPr lang="en-US" smtClean="0"/>
+              <a:rPr lang="en-US"/>
               <a:t>Fourth level</a:t>
             </a:r>
           </a:p>
           <a:p>
             <a:pPr lvl="4"/>
             <a:r>
-              <a:rPr lang="en-US" smtClean="0"/>
+              <a:rPr lang="en-US"/>
               <a:t>Fifth level</a:t>
             </a:r>
-            <a:endParaRPr lang="en-US"/>
           </a:p>
         </p:txBody>
       </p:sp>
@@ -1321,38 +1326,37 @@
           <a:p>
             <a:pPr lvl="0"/>
             <a:r>
-              <a:rPr lang="en-US" smtClean="0"/>
+              <a:rPr lang="en-US"/>
               <a:t>Click to edit Master text styles</a:t>
             </a:r>
           </a:p>
           <a:p>
             <a:pPr lvl="1"/>
             <a:r>
-              <a:rPr lang="en-US" smtClean="0"/>
+              <a:rPr lang="en-US"/>
               <a:t>Second level</a:t>
             </a:r>
           </a:p>
           <a:p>
             <a:pPr lvl="2"/>
             <a:r>
-              <a:rPr lang="en-US" smtClean="0"/>
+              <a:rPr lang="en-US"/>
               <a:t>Third level</a:t>
             </a:r>
           </a:p>
           <a:p>
             <a:pPr lvl="3"/>
             <a:r>
-              <a:rPr lang="en-US" smtClean="0"/>
+              <a:rPr lang="en-US"/>
               <a:t>Fourth level</a:t>
             </a:r>
           </a:p>
           <a:p>
             <a:pPr lvl="4"/>
             <a:r>
-              <a:rPr lang="en-US" smtClean="0"/>
+              <a:rPr lang="en-US"/>
               <a:t>Fifth level</a:t>
             </a:r>
-            <a:endParaRPr lang="en-US"/>
           </a:p>
         </p:txBody>
       </p:sp>
@@ -1373,7 +1377,7 @@
           <a:p>
             <a:fld id="{5BCAD085-E8A6-8845-BD4E-CB4CCA059FC4}" type="datetimeFigureOut">
               <a:rPr lang="en-US" smtClean="0"/>
-              <a:t>1/27/13</a:t>
+              <a:t>4/16/26</a:t>
             </a:fld>
             <a:endParaRPr lang="en-US"/>
           </a:p>
@@ -1471,10 +1475,9 @@
           </a:lstStyle>
           <a:p>
             <a:r>
-              <a:rPr lang="en-US" smtClean="0"/>
+              <a:rPr lang="en-US"/>
               <a:t>Click to edit Master title style</a:t>
             </a:r>
-            <a:endParaRPr lang="en-US"/>
           </a:p>
         </p:txBody>
       </p:sp>
@@ -1537,7 +1540,7 @@
           <a:p>
             <a:pPr lvl="0"/>
             <a:r>
-              <a:rPr lang="en-US" smtClean="0"/>
+              <a:rPr lang="en-US"/>
               <a:t>Click to edit Master text styles</a:t>
             </a:r>
           </a:p>
@@ -1593,38 +1596,37 @@
           <a:p>
             <a:pPr lvl="0"/>
             <a:r>
-              <a:rPr lang="en-US" smtClean="0"/>
+              <a:rPr lang="en-US"/>
               <a:t>Click to edit Master text styles</a:t>
             </a:r>
           </a:p>
           <a:p>
             <a:pPr lvl="1"/>
             <a:r>
-              <a:rPr lang="en-US" smtClean="0"/>
+              <a:rPr lang="en-US"/>
               <a:t>Second level</a:t>
             </a:r>
           </a:p>
           <a:p>
             <a:pPr lvl="2"/>
             <a:r>
-              <a:rPr lang="en-US" smtClean="0"/>
+              <a:rPr lang="en-US"/>
               <a:t>Third level</a:t>
             </a:r>
           </a:p>
           <a:p>
             <a:pPr lvl="3"/>
             <a:r>
-              <a:rPr lang="en-US" smtClean="0"/>
+              <a:rPr lang="en-US"/>
               <a:t>Fourth level</a:t>
             </a:r>
           </a:p>
           <a:p>
             <a:pPr lvl="4"/>
             <a:r>
-              <a:rPr lang="en-US" smtClean="0"/>
+              <a:rPr lang="en-US"/>
               <a:t>Fifth level</a:t>
             </a:r>
-            <a:endParaRPr lang="en-US"/>
           </a:p>
         </p:txBody>
       </p:sp>
@@ -1687,7 +1689,7 @@
           <a:p>
             <a:pPr lvl="0"/>
             <a:r>
-              <a:rPr lang="en-US" smtClean="0"/>
+              <a:rPr lang="en-US"/>
               <a:t>Click to edit Master text styles</a:t>
             </a:r>
           </a:p>
@@ -1743,38 +1745,37 @@
           <a:p>
             <a:pPr lvl="0"/>
             <a:r>
-              <a:rPr lang="en-US" smtClean="0"/>
+              <a:rPr lang="en-US"/>
               <a:t>Click to edit Master text styles</a:t>
             </a:r>
           </a:p>
           <a:p>
             <a:pPr lvl="1"/>
             <a:r>
-              <a:rPr lang="en-US" smtClean="0"/>
+              <a:rPr lang="en-US"/>
               <a:t>Second level</a:t>
             </a:r>
           </a:p>
           <a:p>
             <a:pPr lvl="2"/>
             <a:r>
-              <a:rPr lang="en-US" smtClean="0"/>
+              <a:rPr lang="en-US"/>
               <a:t>Third level</a:t>
             </a:r>
           </a:p>
           <a:p>
             <a:pPr lvl="3"/>
             <a:r>
-              <a:rPr lang="en-US" smtClean="0"/>
+              <a:rPr lang="en-US"/>
               <a:t>Fourth level</a:t>
             </a:r>
           </a:p>
           <a:p>
             <a:pPr lvl="4"/>
             <a:r>
-              <a:rPr lang="en-US" smtClean="0"/>
+              <a:rPr lang="en-US"/>
               <a:t>Fifth level</a:t>
             </a:r>
-            <a:endParaRPr lang="en-US"/>
           </a:p>
         </p:txBody>
       </p:sp>
@@ -1795,7 +1796,7 @@
           <a:p>
             <a:fld id="{5BCAD085-E8A6-8845-BD4E-CB4CCA059FC4}" type="datetimeFigureOut">
               <a:rPr lang="en-US" smtClean="0"/>
-              <a:t>1/27/13</a:t>
+              <a:t>4/16/26</a:t>
             </a:fld>
             <a:endParaRPr lang="en-US"/>
           </a:p>
@@ -1889,10 +1890,9 @@
           <a:lstStyle/>
           <a:p>
             <a:r>
-              <a:rPr lang="en-US" smtClean="0"/>
+              <a:rPr lang="en-US"/>
               <a:t>Click to edit Master title style</a:t>
             </a:r>
-            <a:endParaRPr lang="en-US"/>
           </a:p>
         </p:txBody>
       </p:sp>
@@ -1913,7 +1913,7 @@
           <a:p>
             <a:fld id="{5BCAD085-E8A6-8845-BD4E-CB4CCA059FC4}" type="datetimeFigureOut">
               <a:rPr lang="en-US" smtClean="0"/>
-              <a:t>1/27/13</a:t>
+              <a:t>4/16/26</a:t>
             </a:fld>
             <a:endParaRPr lang="en-US"/>
           </a:p>
@@ -2008,7 +2008,7 @@
           <a:p>
             <a:fld id="{5BCAD085-E8A6-8845-BD4E-CB4CCA059FC4}" type="datetimeFigureOut">
               <a:rPr lang="en-US" smtClean="0"/>
-              <a:t>1/27/13</a:t>
+              <a:t>4/16/26</a:t>
             </a:fld>
             <a:endParaRPr lang="en-US"/>
           </a:p>
@@ -2111,10 +2111,9 @@
           </a:lstStyle>
           <a:p>
             <a:r>
-              <a:rPr lang="en-US" smtClean="0"/>
+              <a:rPr lang="en-US"/>
               <a:t>Click to edit Master title style</a:t>
             </a:r>
-            <a:endParaRPr lang="en-US"/>
           </a:p>
         </p:txBody>
       </p:sp>
@@ -2168,38 +2167,37 @@
           <a:p>
             <a:pPr lvl="0"/>
             <a:r>
-              <a:rPr lang="en-US" smtClean="0"/>
+              <a:rPr lang="en-US"/>
               <a:t>Click to edit Master text styles</a:t>
             </a:r>
           </a:p>
           <a:p>
             <a:pPr lvl="1"/>
             <a:r>
-              <a:rPr lang="en-US" smtClean="0"/>
+              <a:rPr lang="en-US"/>
               <a:t>Second level</a:t>
             </a:r>
           </a:p>
           <a:p>
             <a:pPr lvl="2"/>
             <a:r>
-              <a:rPr lang="en-US" smtClean="0"/>
+              <a:rPr lang="en-US"/>
               <a:t>Third level</a:t>
             </a:r>
           </a:p>
           <a:p>
             <a:pPr lvl="3"/>
             <a:r>
-              <a:rPr lang="en-US" smtClean="0"/>
+              <a:rPr lang="en-US"/>
               <a:t>Fourth level</a:t>
             </a:r>
           </a:p>
           <a:p>
             <a:pPr lvl="4"/>
             <a:r>
-              <a:rPr lang="en-US" smtClean="0"/>
+              <a:rPr lang="en-US"/>
               <a:t>Fifth level</a:t>
             </a:r>
-            <a:endParaRPr lang="en-US"/>
           </a:p>
         </p:txBody>
       </p:sp>
@@ -2262,7 +2260,7 @@
           <a:p>
             <a:pPr lvl="0"/>
             <a:r>
-              <a:rPr lang="en-US" smtClean="0"/>
+              <a:rPr lang="en-US"/>
               <a:t>Click to edit Master text styles</a:t>
             </a:r>
           </a:p>
@@ -2285,7 +2283,7 @@
           <a:p>
             <a:fld id="{5BCAD085-E8A6-8845-BD4E-CB4CCA059FC4}" type="datetimeFigureOut">
               <a:rPr lang="en-US" smtClean="0"/>
-              <a:t>1/27/13</a:t>
+              <a:t>4/16/26</a:t>
             </a:fld>
             <a:endParaRPr lang="en-US"/>
           </a:p>
@@ -2388,10 +2386,9 @@
           </a:lstStyle>
           <a:p>
             <a:r>
-              <a:rPr lang="en-US" smtClean="0"/>
+              <a:rPr lang="en-US"/>
               <a:t>Click to edit Master title style</a:t>
             </a:r>
-            <a:endParaRPr lang="en-US"/>
           </a:p>
         </p:txBody>
       </p:sp>
@@ -2515,7 +2512,7 @@
           <a:p>
             <a:pPr lvl="0"/>
             <a:r>
-              <a:rPr lang="en-US" smtClean="0"/>
+              <a:rPr lang="en-US"/>
               <a:t>Click to edit Master text styles</a:t>
             </a:r>
           </a:p>
@@ -2538,7 +2535,7 @@
           <a:p>
             <a:fld id="{5BCAD085-E8A6-8845-BD4E-CB4CCA059FC4}" type="datetimeFigureOut">
               <a:rPr lang="en-US" smtClean="0"/>
-              <a:t>1/27/13</a:t>
+              <a:t>4/16/26</a:t>
             </a:fld>
             <a:endParaRPr lang="en-US"/>
           </a:p>
@@ -2647,10 +2644,9 @@
           <a:lstStyle/>
           <a:p>
             <a:r>
-              <a:rPr lang="en-US" smtClean="0"/>
+              <a:rPr lang="en-US"/>
               <a:t>Click to edit Master title style</a:t>
             </a:r>
-            <a:endParaRPr lang="en-US"/>
           </a:p>
         </p:txBody>
       </p:sp>
@@ -2681,38 +2677,37 @@
           <a:p>
             <a:pPr lvl="0"/>
             <a:r>
-              <a:rPr lang="en-US" smtClean="0"/>
+              <a:rPr lang="en-US"/>
               <a:t>Click to edit Master text styles</a:t>
             </a:r>
           </a:p>
           <a:p>
             <a:pPr lvl="1"/>
             <a:r>
-              <a:rPr lang="en-US" smtClean="0"/>
+              <a:rPr lang="en-US"/>
               <a:t>Second level</a:t>
             </a:r>
           </a:p>
           <a:p>
             <a:pPr lvl="2"/>
             <a:r>
-              <a:rPr lang="en-US" smtClean="0"/>
+              <a:rPr lang="en-US"/>
               <a:t>Third level</a:t>
             </a:r>
           </a:p>
           <a:p>
             <a:pPr lvl="3"/>
             <a:r>
-              <a:rPr lang="en-US" smtClean="0"/>
+              <a:rPr lang="en-US"/>
               <a:t>Fourth level</a:t>
             </a:r>
           </a:p>
           <a:p>
             <a:pPr lvl="4"/>
             <a:r>
-              <a:rPr lang="en-US" smtClean="0"/>
+              <a:rPr lang="en-US"/>
               <a:t>Fifth level</a:t>
             </a:r>
-            <a:endParaRPr lang="en-US"/>
           </a:p>
         </p:txBody>
       </p:sp>
@@ -2751,7 +2746,7 @@
           <a:p>
             <a:fld id="{5BCAD085-E8A6-8845-BD4E-CB4CCA059FC4}" type="datetimeFigureOut">
               <a:rPr lang="en-US" smtClean="0"/>
-              <a:t>1/27/13</a:t>
+              <a:t>4/16/26</a:t>
             </a:fld>
             <a:endParaRPr lang="en-US"/>
           </a:p>
@@ -3110,7 +3105,7 @@
 </file>
 
 <file path=ppt/slides/slide1.xml><?xml version="1.0" encoding="utf-8"?>
-<p:sld xmlns:a="http://schemas.openxmlformats.org/drawingml/2006/main" xmlns:p="http://schemas.openxmlformats.org/presentationml/2006/main" xmlns:r="http://schemas.openxmlformats.org/officeDocument/2006/relationships">
+<p:sld xmlns:a="http://schemas.openxmlformats.org/drawingml/2006/main" xmlns:r="http://schemas.openxmlformats.org/officeDocument/2006/relationships" xmlns:p="http://schemas.openxmlformats.org/presentationml/2006/main">
   <p:cSld>
     <p:bg>
       <p:bgPr>
@@ -3126,7 +3121,14 @@
         <p:cNvGrpSpPr/>
         <p:nvPr/>
       </p:nvGrpSpPr>
-      <p:grpSpPr/>
+      <p:grpSpPr>
+        <a:xfrm>
+          <a:off x="0" y="0"/>
+          <a:ext cx="0" cy="0"/>
+          <a:chOff x="0" y="0"/>
+          <a:chExt cx="0" cy="0"/>
+        </a:xfrm>
+      </p:grpSpPr>
       <p:sp>
         <p:nvSpPr>
           <p:cNvPr id="2" name="Rectangle 1"/>
@@ -3167,6 +3169,7 @@
           <a:lstStyle/>
           <a:p>
             <a:pPr algn="ctr"/>
+            <a:endParaRPr/>
           </a:p>
         </p:txBody>
       </p:sp>
@@ -3210,6 +3213,7 @@
           <a:lstStyle/>
           <a:p>
             <a:pPr algn="ctr"/>
+            <a:endParaRPr/>
           </a:p>
         </p:txBody>
       </p:sp>
@@ -3253,6 +3257,7 @@
           <a:lstStyle/>
           <a:p>
             <a:pPr algn="ctr"/>
+            <a:endParaRPr/>
           </a:p>
         </p:txBody>
       </p:sp>
@@ -3296,6 +3301,7 @@
           <a:lstStyle/>
           <a:p>
             <a:pPr algn="ctr"/>
+            <a:endParaRPr/>
           </a:p>
         </p:txBody>
       </p:sp>
@@ -3339,6 +3345,7 @@
           <a:lstStyle/>
           <a:p>
             <a:pPr algn="ctr"/>
+            <a:endParaRPr/>
           </a:p>
         </p:txBody>
       </p:sp>
@@ -3382,6 +3389,7 @@
           <a:lstStyle/>
           <a:p>
             <a:pPr algn="ctr"/>
+            <a:endParaRPr/>
           </a:p>
         </p:txBody>
       </p:sp>
@@ -3586,7 +3594,7 @@
 </file>
 
 <file path=ppt/slides/slide10.xml><?xml version="1.0" encoding="utf-8"?>
-<p:sld xmlns:a="http://schemas.openxmlformats.org/drawingml/2006/main" xmlns:p="http://schemas.openxmlformats.org/presentationml/2006/main" xmlns:r="http://schemas.openxmlformats.org/officeDocument/2006/relationships">
+<p:sld xmlns:a="http://schemas.openxmlformats.org/drawingml/2006/main" xmlns:r="http://schemas.openxmlformats.org/officeDocument/2006/relationships" xmlns:p="http://schemas.openxmlformats.org/presentationml/2006/main">
   <p:cSld>
     <p:bg>
       <p:bgPr>
@@ -3602,7 +3610,14 @@
         <p:cNvGrpSpPr/>
         <p:nvPr/>
       </p:nvGrpSpPr>
-      <p:grpSpPr/>
+      <p:grpSpPr>
+        <a:xfrm>
+          <a:off x="0" y="0"/>
+          <a:ext cx="0" cy="0"/>
+          <a:chOff x="0" y="0"/>
+          <a:chExt cx="0" cy="0"/>
+        </a:xfrm>
+      </p:grpSpPr>
       <p:sp>
         <p:nvSpPr>
           <p:cNvPr id="2" name="Rectangle 1"/>
@@ -3643,6 +3658,7 @@
           <a:lstStyle/>
           <a:p>
             <a:pPr algn="ctr"/>
+            <a:endParaRPr/>
           </a:p>
         </p:txBody>
       </p:sp>
@@ -3823,7 +3839,7 @@
 </file>
 
 <file path=ppt/slides/slide11.xml><?xml version="1.0" encoding="utf-8"?>
-<p:sld xmlns:a="http://schemas.openxmlformats.org/drawingml/2006/main" xmlns:p="http://schemas.openxmlformats.org/presentationml/2006/main" xmlns:r="http://schemas.openxmlformats.org/officeDocument/2006/relationships">
+<p:sld xmlns:a="http://schemas.openxmlformats.org/drawingml/2006/main" xmlns:r="http://schemas.openxmlformats.org/officeDocument/2006/relationships" xmlns:p="http://schemas.openxmlformats.org/presentationml/2006/main">
   <p:cSld>
     <p:bg>
       <p:bgPr>
@@ -3839,7 +3855,14 @@
         <p:cNvGrpSpPr/>
         <p:nvPr/>
       </p:nvGrpSpPr>
-      <p:grpSpPr/>
+      <p:grpSpPr>
+        <a:xfrm>
+          <a:off x="0" y="0"/>
+          <a:ext cx="0" cy="0"/>
+          <a:chOff x="0" y="0"/>
+          <a:chExt cx="0" cy="0"/>
+        </a:xfrm>
+      </p:grpSpPr>
       <p:sp>
         <p:nvSpPr>
           <p:cNvPr id="2" name="Rectangle 1"/>
@@ -3880,6 +3903,7 @@
           <a:lstStyle/>
           <a:p>
             <a:pPr algn="ctr"/>
+            <a:endParaRPr/>
           </a:p>
         </p:txBody>
       </p:sp>
@@ -4096,7 +4120,7 @@
 </file>
 
 <file path=ppt/slides/slide12.xml><?xml version="1.0" encoding="utf-8"?>
-<p:sld xmlns:a="http://schemas.openxmlformats.org/drawingml/2006/main" xmlns:p="http://schemas.openxmlformats.org/presentationml/2006/main" xmlns:r="http://schemas.openxmlformats.org/officeDocument/2006/relationships">
+<p:sld xmlns:a="http://schemas.openxmlformats.org/drawingml/2006/main" xmlns:r="http://schemas.openxmlformats.org/officeDocument/2006/relationships" xmlns:p="http://schemas.openxmlformats.org/presentationml/2006/main">
   <p:cSld>
     <p:bg>
       <p:bgPr>
@@ -4112,7 +4136,14 @@
         <p:cNvGrpSpPr/>
         <p:nvPr/>
       </p:nvGrpSpPr>
-      <p:grpSpPr/>
+      <p:grpSpPr>
+        <a:xfrm>
+          <a:off x="0" y="0"/>
+          <a:ext cx="0" cy="0"/>
+          <a:chOff x="0" y="0"/>
+          <a:chExt cx="0" cy="0"/>
+        </a:xfrm>
+      </p:grpSpPr>
       <p:sp>
         <p:nvSpPr>
           <p:cNvPr id="2" name="Rectangle 1"/>
@@ -4153,6 +4184,7 @@
           <a:lstStyle/>
           <a:p>
             <a:pPr algn="ctr"/>
+            <a:endParaRPr/>
           </a:p>
         </p:txBody>
       </p:sp>
@@ -4369,7 +4401,7 @@
 </file>
 
 <file path=ppt/slides/slide13.xml><?xml version="1.0" encoding="utf-8"?>
-<p:sld xmlns:a="http://schemas.openxmlformats.org/drawingml/2006/main" xmlns:p="http://schemas.openxmlformats.org/presentationml/2006/main" xmlns:r="http://schemas.openxmlformats.org/officeDocument/2006/relationships">
+<p:sld xmlns:a="http://schemas.openxmlformats.org/drawingml/2006/main" xmlns:r="http://schemas.openxmlformats.org/officeDocument/2006/relationships" xmlns:p="http://schemas.openxmlformats.org/presentationml/2006/main">
   <p:cSld>
     <p:bg>
       <p:bgPr>
@@ -4385,7 +4417,14 @@
         <p:cNvGrpSpPr/>
         <p:nvPr/>
       </p:nvGrpSpPr>
-      <p:grpSpPr/>
+      <p:grpSpPr>
+        <a:xfrm>
+          <a:off x="0" y="0"/>
+          <a:ext cx="0" cy="0"/>
+          <a:chOff x="0" y="0"/>
+          <a:chExt cx="0" cy="0"/>
+        </a:xfrm>
+      </p:grpSpPr>
       <p:sp>
         <p:nvSpPr>
           <p:cNvPr id="2" name="Rectangle 1"/>
@@ -4426,6 +4465,7 @@
           <a:lstStyle/>
           <a:p>
             <a:pPr algn="ctr"/>
+            <a:endParaRPr/>
           </a:p>
         </p:txBody>
       </p:sp>
@@ -4642,7 +4682,7 @@
 </file>
 
 <file path=ppt/slides/slide14.xml><?xml version="1.0" encoding="utf-8"?>
-<p:sld xmlns:a="http://schemas.openxmlformats.org/drawingml/2006/main" xmlns:p="http://schemas.openxmlformats.org/presentationml/2006/main" xmlns:r="http://schemas.openxmlformats.org/officeDocument/2006/relationships">
+<p:sld xmlns:a="http://schemas.openxmlformats.org/drawingml/2006/main" xmlns:r="http://schemas.openxmlformats.org/officeDocument/2006/relationships" xmlns:p="http://schemas.openxmlformats.org/presentationml/2006/main">
   <p:cSld>
     <p:bg>
       <p:bgPr>
@@ -4658,7 +4698,14 @@
         <p:cNvGrpSpPr/>
         <p:nvPr/>
       </p:nvGrpSpPr>
-      <p:grpSpPr/>
+      <p:grpSpPr>
+        <a:xfrm>
+          <a:off x="0" y="0"/>
+          <a:ext cx="0" cy="0"/>
+          <a:chOff x="0" y="0"/>
+          <a:chExt cx="0" cy="0"/>
+        </a:xfrm>
+      </p:grpSpPr>
       <p:sp>
         <p:nvSpPr>
           <p:cNvPr id="2" name="Rectangle 1"/>
@@ -4699,6 +4746,7 @@
           <a:lstStyle/>
           <a:p>
             <a:pPr algn="ctr"/>
+            <a:endParaRPr/>
           </a:p>
         </p:txBody>
       </p:sp>
@@ -4879,7 +4927,7 @@
 </file>
 
 <file path=ppt/slides/slide15.xml><?xml version="1.0" encoding="utf-8"?>
-<p:sld xmlns:a="http://schemas.openxmlformats.org/drawingml/2006/main" xmlns:p="http://schemas.openxmlformats.org/presentationml/2006/main" xmlns:r="http://schemas.openxmlformats.org/officeDocument/2006/relationships">
+<p:sld xmlns:a="http://schemas.openxmlformats.org/drawingml/2006/main" xmlns:r="http://schemas.openxmlformats.org/officeDocument/2006/relationships" xmlns:p="http://schemas.openxmlformats.org/presentationml/2006/main">
   <p:cSld>
     <p:bg>
       <p:bgPr>
@@ -4895,7 +4943,14 @@
         <p:cNvGrpSpPr/>
         <p:nvPr/>
       </p:nvGrpSpPr>
-      <p:grpSpPr/>
+      <p:grpSpPr>
+        <a:xfrm>
+          <a:off x="0" y="0"/>
+          <a:ext cx="0" cy="0"/>
+          <a:chOff x="0" y="0"/>
+          <a:chExt cx="0" cy="0"/>
+        </a:xfrm>
+      </p:grpSpPr>
       <p:sp>
         <p:nvSpPr>
           <p:cNvPr id="2" name="Rectangle 1"/>
@@ -4936,6 +4991,7 @@
           <a:lstStyle/>
           <a:p>
             <a:pPr algn="ctr"/>
+            <a:endParaRPr/>
           </a:p>
         </p:txBody>
       </p:sp>
@@ -5116,7 +5172,7 @@
 </file>
 
 <file path=ppt/slides/slide16.xml><?xml version="1.0" encoding="utf-8"?>
-<p:sld xmlns:a="http://schemas.openxmlformats.org/drawingml/2006/main" xmlns:p="http://schemas.openxmlformats.org/presentationml/2006/main" xmlns:r="http://schemas.openxmlformats.org/officeDocument/2006/relationships">
+<p:sld xmlns:a="http://schemas.openxmlformats.org/drawingml/2006/main" xmlns:r="http://schemas.openxmlformats.org/officeDocument/2006/relationships" xmlns:p="http://schemas.openxmlformats.org/presentationml/2006/main">
   <p:cSld>
     <p:bg>
       <p:bgPr>
@@ -5132,7 +5188,14 @@
         <p:cNvGrpSpPr/>
         <p:nvPr/>
       </p:nvGrpSpPr>
-      <p:grpSpPr/>
+      <p:grpSpPr>
+        <a:xfrm>
+          <a:off x="0" y="0"/>
+          <a:ext cx="0" cy="0"/>
+          <a:chOff x="0" y="0"/>
+          <a:chExt cx="0" cy="0"/>
+        </a:xfrm>
+      </p:grpSpPr>
       <p:sp>
         <p:nvSpPr>
           <p:cNvPr id="2" name="Rectangle 1"/>
@@ -5173,6 +5236,7 @@
           <a:lstStyle/>
           <a:p>
             <a:pPr algn="ctr"/>
+            <a:endParaRPr/>
           </a:p>
         </p:txBody>
       </p:sp>
@@ -5416,7 +5480,7 @@
 </file>
 
 <file path=ppt/slides/slide17.xml><?xml version="1.0" encoding="utf-8"?>
-<p:sld xmlns:a="http://schemas.openxmlformats.org/drawingml/2006/main" xmlns:p="http://schemas.openxmlformats.org/presentationml/2006/main" xmlns:r="http://schemas.openxmlformats.org/officeDocument/2006/relationships">
+<p:sld xmlns:a="http://schemas.openxmlformats.org/drawingml/2006/main" xmlns:r="http://schemas.openxmlformats.org/officeDocument/2006/relationships" xmlns:p="http://schemas.openxmlformats.org/presentationml/2006/main">
   <p:cSld>
     <p:bg>
       <p:bgPr>
@@ -5432,7 +5496,14 @@
         <p:cNvGrpSpPr/>
         <p:nvPr/>
       </p:nvGrpSpPr>
-      <p:grpSpPr/>
+      <p:grpSpPr>
+        <a:xfrm>
+          <a:off x="0" y="0"/>
+          <a:ext cx="0" cy="0"/>
+          <a:chOff x="0" y="0"/>
+          <a:chExt cx="0" cy="0"/>
+        </a:xfrm>
+      </p:grpSpPr>
       <p:sp>
         <p:nvSpPr>
           <p:cNvPr id="2" name="Rectangle 1"/>
@@ -5473,6 +5544,7 @@
           <a:lstStyle/>
           <a:p>
             <a:pPr algn="ctr"/>
+            <a:endParaRPr/>
           </a:p>
         </p:txBody>
       </p:sp>
@@ -5556,7 +5628,7 @@
         </p:nvSpPr>
         <p:spPr>
           <a:xfrm>
-            <a:off x="731520" y="2103120"/>
+            <a:off x="731520" y="1709928"/>
             <a:ext cx="10515600" cy="365760"/>
           </a:xfrm>
           <a:prstGeom prst="rect">
@@ -5592,7 +5664,7 @@
         </p:nvSpPr>
         <p:spPr>
           <a:xfrm>
-            <a:off x="731520" y="2560320"/>
+            <a:off x="731520" y="2007108"/>
             <a:ext cx="10515600" cy="2011680"/>
           </a:xfrm>
           <a:prstGeom prst="rect">
@@ -5615,6 +5687,7 @@
               </a:defRPr>
             </a:pPr>
             <a:r>
+              <a:rPr dirty="0"/>
               <a:t>4 scenarios appear on screen one at a time. For each, vote live: which value would you sacrifice first? Show results. Where the room splits, that's the discussion.</a:t>
             </a:r>
           </a:p>
@@ -5628,7 +5701,7 @@
         </p:nvSpPr>
         <p:spPr>
           <a:xfrm>
-            <a:off x="731520" y="4663440"/>
+            <a:off x="731520" y="3017520"/>
             <a:ext cx="10515600" cy="320040"/>
           </a:xfrm>
           <a:prstGeom prst="rect">
@@ -5651,6 +5724,7 @@
               </a:defRPr>
             </a:pPr>
             <a:r>
+              <a:rPr dirty="0"/>
               <a:t>PROMPTS</a:t>
             </a:r>
           </a:p>
@@ -5664,7 +5738,7 @@
         </p:nvSpPr>
         <p:spPr>
           <a:xfrm>
-            <a:off x="731520" y="4983480"/>
+            <a:off x="731520" y="3337560"/>
             <a:ext cx="10515600" cy="2103120"/>
           </a:xfrm>
           <a:prstGeom prst="rect">
@@ -5690,6 +5764,7 @@
               </a:defRPr>
             </a:pPr>
             <a:r>
+              <a:rPr dirty="0"/>
               <a:t>•  Half the group isn't engaging. You have 5 minutes left. Do you push on or change the plan?</a:t>
             </a:r>
           </a:p>
@@ -5706,6 +5781,7 @@
               </a:defRPr>
             </a:pPr>
             <a:r>
+              <a:rPr dirty="0"/>
               <a:t>•  A young person says something offensive in the chat. Do you delete it, address it publicly, or message them privately?</a:t>
             </a:r>
           </a:p>
@@ -5722,6 +5798,7 @@
               </a:defRPr>
             </a:pPr>
             <a:r>
+              <a:rPr dirty="0"/>
               <a:t>•  The Wi-Fi goes down mid-session. You have 20 young people looking at you. What do you do?</a:t>
             </a:r>
           </a:p>
@@ -5738,6 +5815,7 @@
               </a:defRPr>
             </a:pPr>
             <a:r>
+              <a:rPr dirty="0"/>
               <a:t>•  Two participants are dominating. Others have gone silent. Do you intervene or let it play out?</a:t>
             </a:r>
           </a:p>
@@ -5812,7 +5890,7 @@
 </file>
 
 <file path=ppt/slides/slide18.xml><?xml version="1.0" encoding="utf-8"?>
-<p:sld xmlns:a="http://schemas.openxmlformats.org/drawingml/2006/main" xmlns:p="http://schemas.openxmlformats.org/presentationml/2006/main" xmlns:r="http://schemas.openxmlformats.org/officeDocument/2006/relationships">
+<p:sld xmlns:a="http://schemas.openxmlformats.org/drawingml/2006/main" xmlns:r="http://schemas.openxmlformats.org/officeDocument/2006/relationships" xmlns:p="http://schemas.openxmlformats.org/presentationml/2006/main">
   <p:cSld>
     <p:bg>
       <p:bgPr>
@@ -5828,7 +5906,14 @@
         <p:cNvGrpSpPr/>
         <p:nvPr/>
       </p:nvGrpSpPr>
-      <p:grpSpPr/>
+      <p:grpSpPr>
+        <a:xfrm>
+          <a:off x="0" y="0"/>
+          <a:ext cx="0" cy="0"/>
+          <a:chOff x="0" y="0"/>
+          <a:chExt cx="0" cy="0"/>
+        </a:xfrm>
+      </p:grpSpPr>
       <p:sp>
         <p:nvSpPr>
           <p:cNvPr id="2" name="Rectangle 1"/>
@@ -5869,6 +5954,7 @@
           <a:lstStyle/>
           <a:p>
             <a:pPr algn="ctr"/>
+            <a:endParaRPr/>
           </a:p>
         </p:txBody>
       </p:sp>
@@ -6085,7 +6171,7 @@
 </file>
 
 <file path=ppt/slides/slide19.xml><?xml version="1.0" encoding="utf-8"?>
-<p:sld xmlns:a="http://schemas.openxmlformats.org/drawingml/2006/main" xmlns:p="http://schemas.openxmlformats.org/presentationml/2006/main" xmlns:r="http://schemas.openxmlformats.org/officeDocument/2006/relationships">
+<p:sld xmlns:a="http://schemas.openxmlformats.org/drawingml/2006/main" xmlns:r="http://schemas.openxmlformats.org/officeDocument/2006/relationships" xmlns:p="http://schemas.openxmlformats.org/presentationml/2006/main">
   <p:cSld>
     <p:bg>
       <p:bgPr>
@@ -6101,7 +6187,14 @@
         <p:cNvGrpSpPr/>
         <p:nvPr/>
       </p:nvGrpSpPr>
-      <p:grpSpPr/>
+      <p:grpSpPr>
+        <a:xfrm>
+          <a:off x="0" y="0"/>
+          <a:ext cx="0" cy="0"/>
+          <a:chOff x="0" y="0"/>
+          <a:chExt cx="0" cy="0"/>
+        </a:xfrm>
+      </p:grpSpPr>
       <p:sp>
         <p:nvSpPr>
           <p:cNvPr id="2" name="Rectangle 1"/>
@@ -6142,6 +6235,7 @@
           <a:lstStyle/>
           <a:p>
             <a:pPr algn="ctr"/>
+            <a:endParaRPr/>
           </a:p>
         </p:txBody>
       </p:sp>
@@ -6322,7 +6416,7 @@
 </file>
 
 <file path=ppt/slides/slide2.xml><?xml version="1.0" encoding="utf-8"?>
-<p:sld xmlns:a="http://schemas.openxmlformats.org/drawingml/2006/main" xmlns:p="http://schemas.openxmlformats.org/presentationml/2006/main" xmlns:r="http://schemas.openxmlformats.org/officeDocument/2006/relationships">
+<p:sld xmlns:a="http://schemas.openxmlformats.org/drawingml/2006/main" xmlns:r="http://schemas.openxmlformats.org/officeDocument/2006/relationships" xmlns:p="http://schemas.openxmlformats.org/presentationml/2006/main">
   <p:cSld>
     <p:bg>
       <p:bgPr>
@@ -6338,7 +6432,14 @@
         <p:cNvGrpSpPr/>
         <p:nvPr/>
       </p:nvGrpSpPr>
-      <p:grpSpPr/>
+      <p:grpSpPr>
+        <a:xfrm>
+          <a:off x="0" y="0"/>
+          <a:ext cx="0" cy="0"/>
+          <a:chOff x="0" y="0"/>
+          <a:chExt cx="0" cy="0"/>
+        </a:xfrm>
+      </p:grpSpPr>
       <p:sp>
         <p:nvSpPr>
           <p:cNvPr id="2" name="Rectangle 1"/>
@@ -6379,6 +6480,7 @@
           <a:lstStyle/>
           <a:p>
             <a:pPr algn="ctr"/>
+            <a:endParaRPr/>
           </a:p>
         </p:txBody>
       </p:sp>
@@ -6422,6 +6524,7 @@
           <a:lstStyle/>
           <a:p>
             <a:pPr algn="ctr"/>
+            <a:endParaRPr/>
           </a:p>
         </p:txBody>
       </p:sp>
@@ -6465,6 +6568,7 @@
           <a:lstStyle/>
           <a:p>
             <a:pPr algn="ctr"/>
+            <a:endParaRPr/>
           </a:p>
         </p:txBody>
       </p:sp>
@@ -6780,7 +6884,7 @@
 </file>
 
 <file path=ppt/slides/slide20.xml><?xml version="1.0" encoding="utf-8"?>
-<p:sld xmlns:a="http://schemas.openxmlformats.org/drawingml/2006/main" xmlns:p="http://schemas.openxmlformats.org/presentationml/2006/main" xmlns:r="http://schemas.openxmlformats.org/officeDocument/2006/relationships">
+<p:sld xmlns:a="http://schemas.openxmlformats.org/drawingml/2006/main" xmlns:r="http://schemas.openxmlformats.org/officeDocument/2006/relationships" xmlns:p="http://schemas.openxmlformats.org/presentationml/2006/main">
   <p:cSld>
     <p:bg>
       <p:bgPr>
@@ -6796,7 +6900,14 @@
         <p:cNvGrpSpPr/>
         <p:nvPr/>
       </p:nvGrpSpPr>
-      <p:grpSpPr/>
+      <p:grpSpPr>
+        <a:xfrm>
+          <a:off x="0" y="0"/>
+          <a:ext cx="0" cy="0"/>
+          <a:chOff x="0" y="0"/>
+          <a:chExt cx="0" cy="0"/>
+        </a:xfrm>
+      </p:grpSpPr>
       <p:sp>
         <p:nvSpPr>
           <p:cNvPr id="2" name="Rectangle 1"/>
@@ -6837,6 +6948,7 @@
           <a:lstStyle/>
           <a:p>
             <a:pPr algn="ctr"/>
+            <a:endParaRPr/>
           </a:p>
         </p:txBody>
       </p:sp>
@@ -7017,7 +7129,7 @@
 </file>
 
 <file path=ppt/slides/slide21.xml><?xml version="1.0" encoding="utf-8"?>
-<p:sld xmlns:a="http://schemas.openxmlformats.org/drawingml/2006/main" xmlns:p="http://schemas.openxmlformats.org/presentationml/2006/main" xmlns:r="http://schemas.openxmlformats.org/officeDocument/2006/relationships">
+<p:sld xmlns:a="http://schemas.openxmlformats.org/drawingml/2006/main" xmlns:r="http://schemas.openxmlformats.org/officeDocument/2006/relationships" xmlns:p="http://schemas.openxmlformats.org/presentationml/2006/main">
   <p:cSld>
     <p:bg>
       <p:bgPr>
@@ -7033,7 +7145,14 @@
         <p:cNvGrpSpPr/>
         <p:nvPr/>
       </p:nvGrpSpPr>
-      <p:grpSpPr/>
+      <p:grpSpPr>
+        <a:xfrm>
+          <a:off x="0" y="0"/>
+          <a:ext cx="0" cy="0"/>
+          <a:chOff x="0" y="0"/>
+          <a:chExt cx="0" cy="0"/>
+        </a:xfrm>
+      </p:grpSpPr>
       <p:sp>
         <p:nvSpPr>
           <p:cNvPr id="2" name="Rectangle 1"/>
@@ -7074,6 +7193,7 @@
           <a:lstStyle/>
           <a:p>
             <a:pPr algn="ctr"/>
+            <a:endParaRPr/>
           </a:p>
         </p:txBody>
       </p:sp>
@@ -7369,7 +7489,7 @@
 </file>
 
 <file path=ppt/slides/slide22.xml><?xml version="1.0" encoding="utf-8"?>
-<p:sld xmlns:a="http://schemas.openxmlformats.org/drawingml/2006/main" xmlns:p="http://schemas.openxmlformats.org/presentationml/2006/main" xmlns:r="http://schemas.openxmlformats.org/officeDocument/2006/relationships">
+<p:sld xmlns:a="http://schemas.openxmlformats.org/drawingml/2006/main" xmlns:r="http://schemas.openxmlformats.org/officeDocument/2006/relationships" xmlns:p="http://schemas.openxmlformats.org/presentationml/2006/main">
   <p:cSld>
     <p:bg>
       <p:bgPr>
@@ -7385,7 +7505,14 @@
         <p:cNvGrpSpPr/>
         <p:nvPr/>
       </p:nvGrpSpPr>
-      <p:grpSpPr/>
+      <p:grpSpPr>
+        <a:xfrm>
+          <a:off x="0" y="0"/>
+          <a:ext cx="0" cy="0"/>
+          <a:chOff x="0" y="0"/>
+          <a:chExt cx="0" cy="0"/>
+        </a:xfrm>
+      </p:grpSpPr>
       <p:sp>
         <p:nvSpPr>
           <p:cNvPr id="2" name="Rectangle 1"/>
@@ -7426,6 +7553,7 @@
           <a:lstStyle/>
           <a:p>
             <a:pPr algn="ctr"/>
+            <a:endParaRPr/>
           </a:p>
         </p:txBody>
       </p:sp>
@@ -7642,7 +7770,7 @@
 </file>
 
 <file path=ppt/slides/slide23.xml><?xml version="1.0" encoding="utf-8"?>
-<p:sld xmlns:a="http://schemas.openxmlformats.org/drawingml/2006/main" xmlns:p="http://schemas.openxmlformats.org/presentationml/2006/main" xmlns:r="http://schemas.openxmlformats.org/officeDocument/2006/relationships">
+<p:sld xmlns:a="http://schemas.openxmlformats.org/drawingml/2006/main" xmlns:r="http://schemas.openxmlformats.org/officeDocument/2006/relationships" xmlns:p="http://schemas.openxmlformats.org/presentationml/2006/main">
   <p:cSld>
     <p:bg>
       <p:bgPr>
@@ -7658,7 +7786,14 @@
         <p:cNvGrpSpPr/>
         <p:nvPr/>
       </p:nvGrpSpPr>
-      <p:grpSpPr/>
+      <p:grpSpPr>
+        <a:xfrm>
+          <a:off x="0" y="0"/>
+          <a:ext cx="0" cy="0"/>
+          <a:chOff x="0" y="0"/>
+          <a:chExt cx="0" cy="0"/>
+        </a:xfrm>
+      </p:grpSpPr>
       <p:sp>
         <p:nvSpPr>
           <p:cNvPr id="2" name="Rectangle 1"/>
@@ -7699,6 +7834,7 @@
           <a:lstStyle/>
           <a:p>
             <a:pPr algn="ctr"/>
+            <a:endParaRPr/>
           </a:p>
         </p:txBody>
       </p:sp>
@@ -7879,7 +8015,7 @@
 </file>
 
 <file path=ppt/slides/slide24.xml><?xml version="1.0" encoding="utf-8"?>
-<p:sld xmlns:a="http://schemas.openxmlformats.org/drawingml/2006/main" xmlns:p="http://schemas.openxmlformats.org/presentationml/2006/main" xmlns:r="http://schemas.openxmlformats.org/officeDocument/2006/relationships">
+<p:sld xmlns:a="http://schemas.openxmlformats.org/drawingml/2006/main" xmlns:r="http://schemas.openxmlformats.org/officeDocument/2006/relationships" xmlns:p="http://schemas.openxmlformats.org/presentationml/2006/main">
   <p:cSld>
     <p:bg>
       <p:bgPr>
@@ -7895,7 +8031,14 @@
         <p:cNvGrpSpPr/>
         <p:nvPr/>
       </p:nvGrpSpPr>
-      <p:grpSpPr/>
+      <p:grpSpPr>
+        <a:xfrm>
+          <a:off x="0" y="0"/>
+          <a:ext cx="0" cy="0"/>
+          <a:chOff x="0" y="0"/>
+          <a:chExt cx="0" cy="0"/>
+        </a:xfrm>
+      </p:grpSpPr>
       <p:sp>
         <p:nvSpPr>
           <p:cNvPr id="2" name="Rectangle 1"/>
@@ -7936,6 +8079,7 @@
           <a:lstStyle/>
           <a:p>
             <a:pPr algn="ctr"/>
+            <a:endParaRPr/>
           </a:p>
         </p:txBody>
       </p:sp>
@@ -8019,7 +8163,7 @@
         </p:nvSpPr>
         <p:spPr>
           <a:xfrm>
-            <a:off x="731520" y="2103120"/>
+            <a:off x="731520" y="1600200"/>
             <a:ext cx="10515600" cy="2011680"/>
           </a:xfrm>
           <a:prstGeom prst="rect">
@@ -8055,7 +8199,7 @@
         </p:nvSpPr>
         <p:spPr>
           <a:xfrm>
-            <a:off x="731520" y="4206240"/>
+            <a:off x="731520" y="2926080"/>
             <a:ext cx="10515600" cy="320040"/>
           </a:xfrm>
           <a:prstGeom prst="rect">
@@ -8091,7 +8235,7 @@
         </p:nvSpPr>
         <p:spPr>
           <a:xfrm>
-            <a:off x="731520" y="4526280"/>
+            <a:off x="731520" y="3246120"/>
             <a:ext cx="10515600" cy="2103120"/>
           </a:xfrm>
           <a:prstGeom prst="rect">
@@ -8117,6 +8261,7 @@
               </a:defRPr>
             </a:pPr>
             <a:r>
+              <a:rPr dirty="0"/>
               <a:t>•  When is it OK to compromise your values in youth work — and when isn't it?</a:t>
             </a:r>
           </a:p>
@@ -8133,6 +8278,7 @@
               </a:defRPr>
             </a:pPr>
             <a:r>
+              <a:rPr dirty="0"/>
               <a:t>•  Name a time you stayed silent when you should have spoken up. What stopped you?</a:t>
             </a:r>
           </a:p>
@@ -8149,6 +8295,7 @@
               </a:defRPr>
             </a:pPr>
             <a:r>
+              <a:rPr dirty="0"/>
               <a:t>•  Have you ever picked the tool that was easy over the tool that was right? What happened?</a:t>
             </a:r>
           </a:p>
@@ -8165,6 +8312,7 @@
               </a:defRPr>
             </a:pPr>
             <a:r>
+              <a:rPr dirty="0"/>
               <a:t>•  If a young person asked you 'do you actually believe this?' about something you're running — could you answer honestly?</a:t>
             </a:r>
           </a:p>
@@ -8181,6 +8329,7 @@
               </a:defRPr>
             </a:pPr>
             <a:r>
+              <a:rPr dirty="0"/>
               <a:t>•  What's a value your org says loudly that you've quietly stopped believing in?</a:t>
             </a:r>
           </a:p>
@@ -8197,6 +8346,7 @@
               </a:defRPr>
             </a:pPr>
             <a:r>
+              <a:rPr dirty="0"/>
               <a:t>•  When your values clash with your manager's, whose win — and why?</a:t>
             </a:r>
           </a:p>
@@ -8271,7 +8421,7 @@
 </file>
 
 <file path=ppt/slides/slide25.xml><?xml version="1.0" encoding="utf-8"?>
-<p:sld xmlns:a="http://schemas.openxmlformats.org/drawingml/2006/main" xmlns:p="http://schemas.openxmlformats.org/presentationml/2006/main" xmlns:r="http://schemas.openxmlformats.org/officeDocument/2006/relationships">
+<p:sld xmlns:a="http://schemas.openxmlformats.org/drawingml/2006/main" xmlns:r="http://schemas.openxmlformats.org/officeDocument/2006/relationships" xmlns:p="http://schemas.openxmlformats.org/presentationml/2006/main">
   <p:cSld>
     <p:bg>
       <p:bgPr>
@@ -8287,7 +8437,14 @@
         <p:cNvGrpSpPr/>
         <p:nvPr/>
       </p:nvGrpSpPr>
-      <p:grpSpPr/>
+      <p:grpSpPr>
+        <a:xfrm>
+          <a:off x="0" y="0"/>
+          <a:ext cx="0" cy="0"/>
+          <a:chOff x="0" y="0"/>
+          <a:chExt cx="0" cy="0"/>
+        </a:xfrm>
+      </p:grpSpPr>
       <p:sp>
         <p:nvSpPr>
           <p:cNvPr id="2" name="Rectangle 1"/>
@@ -8328,6 +8485,7 @@
           <a:lstStyle/>
           <a:p>
             <a:pPr algn="ctr"/>
+            <a:endParaRPr/>
           </a:p>
         </p:txBody>
       </p:sp>
@@ -8544,7 +8702,7 @@
 </file>
 
 <file path=ppt/slides/slide26.xml><?xml version="1.0" encoding="utf-8"?>
-<p:sld xmlns:a="http://schemas.openxmlformats.org/drawingml/2006/main" xmlns:p="http://schemas.openxmlformats.org/presentationml/2006/main" xmlns:r="http://schemas.openxmlformats.org/officeDocument/2006/relationships">
+<p:sld xmlns:a="http://schemas.openxmlformats.org/drawingml/2006/main" xmlns:r="http://schemas.openxmlformats.org/officeDocument/2006/relationships" xmlns:p="http://schemas.openxmlformats.org/presentationml/2006/main">
   <p:cSld>
     <p:bg>
       <p:bgPr>
@@ -8560,7 +8718,14 @@
         <p:cNvGrpSpPr/>
         <p:nvPr/>
       </p:nvGrpSpPr>
-      <p:grpSpPr/>
+      <p:grpSpPr>
+        <a:xfrm>
+          <a:off x="0" y="0"/>
+          <a:ext cx="0" cy="0"/>
+          <a:chOff x="0" y="0"/>
+          <a:chExt cx="0" cy="0"/>
+        </a:xfrm>
+      </p:grpSpPr>
       <p:sp>
         <p:nvSpPr>
           <p:cNvPr id="2" name="Rectangle 1"/>
@@ -8601,6 +8766,7 @@
           <a:lstStyle/>
           <a:p>
             <a:pPr algn="ctr"/>
+            <a:endParaRPr/>
           </a:p>
         </p:txBody>
       </p:sp>
@@ -8781,7 +8947,7 @@
 </file>
 
 <file path=ppt/slides/slide27.xml><?xml version="1.0" encoding="utf-8"?>
-<p:sld xmlns:a="http://schemas.openxmlformats.org/drawingml/2006/main" xmlns:p="http://schemas.openxmlformats.org/presentationml/2006/main" xmlns:r="http://schemas.openxmlformats.org/officeDocument/2006/relationships">
+<p:sld xmlns:a="http://schemas.openxmlformats.org/drawingml/2006/main" xmlns:r="http://schemas.openxmlformats.org/officeDocument/2006/relationships" xmlns:p="http://schemas.openxmlformats.org/presentationml/2006/main">
   <p:cSld>
     <p:bg>
       <p:bgPr>
@@ -8797,7 +8963,14 @@
         <p:cNvGrpSpPr/>
         <p:nvPr/>
       </p:nvGrpSpPr>
-      <p:grpSpPr/>
+      <p:grpSpPr>
+        <a:xfrm>
+          <a:off x="0" y="0"/>
+          <a:ext cx="0" cy="0"/>
+          <a:chOff x="0" y="0"/>
+          <a:chExt cx="0" cy="0"/>
+        </a:xfrm>
+      </p:grpSpPr>
       <p:sp>
         <p:nvSpPr>
           <p:cNvPr id="2" name="Rectangle 1"/>
@@ -8838,6 +9011,7 @@
           <a:lstStyle/>
           <a:p>
             <a:pPr algn="ctr"/>
+            <a:endParaRPr/>
           </a:p>
         </p:txBody>
       </p:sp>
@@ -9030,7 +9204,7 @@
 </file>
 
 <file path=ppt/slides/slide28.xml><?xml version="1.0" encoding="utf-8"?>
-<p:sld xmlns:a="http://schemas.openxmlformats.org/drawingml/2006/main" xmlns:p="http://schemas.openxmlformats.org/presentationml/2006/main" xmlns:r="http://schemas.openxmlformats.org/officeDocument/2006/relationships">
+<p:sld xmlns:a="http://schemas.openxmlformats.org/drawingml/2006/main" xmlns:r="http://schemas.openxmlformats.org/officeDocument/2006/relationships" xmlns:p="http://schemas.openxmlformats.org/presentationml/2006/main">
   <p:cSld>
     <p:bg>
       <p:bgPr>
@@ -9046,7 +9220,14 @@
         <p:cNvGrpSpPr/>
         <p:nvPr/>
       </p:nvGrpSpPr>
-      <p:grpSpPr/>
+      <p:grpSpPr>
+        <a:xfrm>
+          <a:off x="0" y="0"/>
+          <a:ext cx="0" cy="0"/>
+          <a:chOff x="0" y="0"/>
+          <a:chExt cx="0" cy="0"/>
+        </a:xfrm>
+      </p:grpSpPr>
       <p:sp>
         <p:nvSpPr>
           <p:cNvPr id="2" name="Rectangle 1"/>
@@ -9087,6 +9268,7 @@
           <a:lstStyle/>
           <a:p>
             <a:pPr algn="ctr"/>
+            <a:endParaRPr/>
           </a:p>
         </p:txBody>
       </p:sp>
@@ -9303,7 +9485,7 @@
 </file>
 
 <file path=ppt/slides/slide29.xml><?xml version="1.0" encoding="utf-8"?>
-<p:sld xmlns:a="http://schemas.openxmlformats.org/drawingml/2006/main" xmlns:p="http://schemas.openxmlformats.org/presentationml/2006/main" xmlns:r="http://schemas.openxmlformats.org/officeDocument/2006/relationships">
+<p:sld xmlns:a="http://schemas.openxmlformats.org/drawingml/2006/main" xmlns:r="http://schemas.openxmlformats.org/officeDocument/2006/relationships" xmlns:p="http://schemas.openxmlformats.org/presentationml/2006/main">
   <p:cSld>
     <p:bg>
       <p:bgPr>
@@ -9319,7 +9501,14 @@
         <p:cNvGrpSpPr/>
         <p:nvPr/>
       </p:nvGrpSpPr>
-      <p:grpSpPr/>
+      <p:grpSpPr>
+        <a:xfrm>
+          <a:off x="0" y="0"/>
+          <a:ext cx="0" cy="0"/>
+          <a:chOff x="0" y="0"/>
+          <a:chExt cx="0" cy="0"/>
+        </a:xfrm>
+      </p:grpSpPr>
       <p:sp>
         <p:nvSpPr>
           <p:cNvPr id="2" name="Rectangle 1"/>
@@ -9360,6 +9549,7 @@
           <a:lstStyle/>
           <a:p>
             <a:pPr algn="ctr"/>
+            <a:endParaRPr/>
           </a:p>
         </p:txBody>
       </p:sp>
@@ -9540,7 +9730,7 @@
 </file>
 
 <file path=ppt/slides/slide3.xml><?xml version="1.0" encoding="utf-8"?>
-<p:sld xmlns:a="http://schemas.openxmlformats.org/drawingml/2006/main" xmlns:p="http://schemas.openxmlformats.org/presentationml/2006/main" xmlns:r="http://schemas.openxmlformats.org/officeDocument/2006/relationships">
+<p:sld xmlns:a="http://schemas.openxmlformats.org/drawingml/2006/main" xmlns:r="http://schemas.openxmlformats.org/officeDocument/2006/relationships" xmlns:p="http://schemas.openxmlformats.org/presentationml/2006/main">
   <p:cSld>
     <p:bg>
       <p:bgPr>
@@ -9556,7 +9746,14 @@
         <p:cNvGrpSpPr/>
         <p:nvPr/>
       </p:nvGrpSpPr>
-      <p:grpSpPr/>
+      <p:grpSpPr>
+        <a:xfrm>
+          <a:off x="0" y="0"/>
+          <a:ext cx="0" cy="0"/>
+          <a:chOff x="0" y="0"/>
+          <a:chExt cx="0" cy="0"/>
+        </a:xfrm>
+      </p:grpSpPr>
       <p:sp>
         <p:nvSpPr>
           <p:cNvPr id="2" name="Rectangle 1"/>
@@ -9597,6 +9794,7 @@
           <a:lstStyle/>
           <a:p>
             <a:pPr algn="ctr"/>
+            <a:endParaRPr/>
           </a:p>
         </p:txBody>
       </p:sp>
@@ -9789,7 +9987,7 @@
 </file>
 
 <file path=ppt/slides/slide30.xml><?xml version="1.0" encoding="utf-8"?>
-<p:sld xmlns:a="http://schemas.openxmlformats.org/drawingml/2006/main" xmlns:p="http://schemas.openxmlformats.org/presentationml/2006/main" xmlns:r="http://schemas.openxmlformats.org/officeDocument/2006/relationships">
+<p:sld xmlns:a="http://schemas.openxmlformats.org/drawingml/2006/main" xmlns:r="http://schemas.openxmlformats.org/officeDocument/2006/relationships" xmlns:p="http://schemas.openxmlformats.org/presentationml/2006/main">
   <p:cSld>
     <p:bg>
       <p:bgPr>
@@ -9805,7 +10003,14 @@
         <p:cNvGrpSpPr/>
         <p:nvPr/>
       </p:nvGrpSpPr>
-      <p:grpSpPr/>
+      <p:grpSpPr>
+        <a:xfrm>
+          <a:off x="0" y="0"/>
+          <a:ext cx="0" cy="0"/>
+          <a:chOff x="0" y="0"/>
+          <a:chExt cx="0" cy="0"/>
+        </a:xfrm>
+      </p:grpSpPr>
       <p:sp>
         <p:nvSpPr>
           <p:cNvPr id="2" name="Rectangle 1"/>
@@ -9846,6 +10051,7 @@
           <a:lstStyle/>
           <a:p>
             <a:pPr algn="ctr"/>
+            <a:endParaRPr/>
           </a:p>
         </p:txBody>
       </p:sp>
@@ -10062,7 +10268,7 @@
 </file>
 
 <file path=ppt/slides/slide31.xml><?xml version="1.0" encoding="utf-8"?>
-<p:sld xmlns:a="http://schemas.openxmlformats.org/drawingml/2006/main" xmlns:p="http://schemas.openxmlformats.org/presentationml/2006/main" xmlns:r="http://schemas.openxmlformats.org/officeDocument/2006/relationships">
+<p:sld xmlns:a="http://schemas.openxmlformats.org/drawingml/2006/main" xmlns:r="http://schemas.openxmlformats.org/officeDocument/2006/relationships" xmlns:p="http://schemas.openxmlformats.org/presentationml/2006/main">
   <p:cSld>
     <p:bg>
       <p:bgPr>
@@ -10078,7 +10284,14 @@
         <p:cNvGrpSpPr/>
         <p:nvPr/>
       </p:nvGrpSpPr>
-      <p:grpSpPr/>
+      <p:grpSpPr>
+        <a:xfrm>
+          <a:off x="0" y="0"/>
+          <a:ext cx="0" cy="0"/>
+          <a:chOff x="0" y="0"/>
+          <a:chExt cx="0" cy="0"/>
+        </a:xfrm>
+      </p:grpSpPr>
       <p:sp>
         <p:nvSpPr>
           <p:cNvPr id="2" name="Rectangle 1"/>
@@ -10119,6 +10332,7 @@
           <a:lstStyle/>
           <a:p>
             <a:pPr algn="ctr"/>
+            <a:endParaRPr/>
           </a:p>
         </p:txBody>
       </p:sp>
@@ -10299,7 +10513,7 @@
 </file>
 
 <file path=ppt/slides/slide32.xml><?xml version="1.0" encoding="utf-8"?>
-<p:sld xmlns:a="http://schemas.openxmlformats.org/drawingml/2006/main" xmlns:p="http://schemas.openxmlformats.org/presentationml/2006/main" xmlns:r="http://schemas.openxmlformats.org/officeDocument/2006/relationships">
+<p:sld xmlns:a="http://schemas.openxmlformats.org/drawingml/2006/main" xmlns:r="http://schemas.openxmlformats.org/officeDocument/2006/relationships" xmlns:p="http://schemas.openxmlformats.org/presentationml/2006/main">
   <p:cSld>
     <p:bg>
       <p:bgPr>
@@ -10315,7 +10529,14 @@
         <p:cNvGrpSpPr/>
         <p:nvPr/>
       </p:nvGrpSpPr>
-      <p:grpSpPr/>
+      <p:grpSpPr>
+        <a:xfrm>
+          <a:off x="0" y="0"/>
+          <a:ext cx="0" cy="0"/>
+          <a:chOff x="0" y="0"/>
+          <a:chExt cx="0" cy="0"/>
+        </a:xfrm>
+      </p:grpSpPr>
       <p:sp>
         <p:nvSpPr>
           <p:cNvPr id="2" name="Rectangle 1"/>
@@ -10356,6 +10577,7 @@
           <a:lstStyle/>
           <a:p>
             <a:pPr algn="ctr"/>
+            <a:endParaRPr/>
           </a:p>
         </p:txBody>
       </p:sp>
@@ -10399,6 +10621,7 @@
           <a:lstStyle/>
           <a:p>
             <a:pPr algn="ctr"/>
+            <a:endParaRPr/>
           </a:p>
         </p:txBody>
       </p:sp>
@@ -10442,6 +10665,7 @@
           <a:lstStyle/>
           <a:p>
             <a:pPr algn="ctr"/>
+            <a:endParaRPr/>
           </a:p>
         </p:txBody>
       </p:sp>
@@ -10622,7 +10846,7 @@
 </file>
 
 <file path=ppt/slides/slide4.xml><?xml version="1.0" encoding="utf-8"?>
-<p:sld xmlns:a="http://schemas.openxmlformats.org/drawingml/2006/main" xmlns:p="http://schemas.openxmlformats.org/presentationml/2006/main" xmlns:r="http://schemas.openxmlformats.org/officeDocument/2006/relationships">
+<p:sld xmlns:a="http://schemas.openxmlformats.org/drawingml/2006/main" xmlns:r="http://schemas.openxmlformats.org/officeDocument/2006/relationships" xmlns:p="http://schemas.openxmlformats.org/presentationml/2006/main">
   <p:cSld>
     <p:bg>
       <p:bgPr>
@@ -10638,7 +10862,14 @@
         <p:cNvGrpSpPr/>
         <p:nvPr/>
       </p:nvGrpSpPr>
-      <p:grpSpPr/>
+      <p:grpSpPr>
+        <a:xfrm>
+          <a:off x="0" y="0"/>
+          <a:ext cx="0" cy="0"/>
+          <a:chOff x="0" y="0"/>
+          <a:chExt cx="0" cy="0"/>
+        </a:xfrm>
+      </p:grpSpPr>
       <p:sp>
         <p:nvSpPr>
           <p:cNvPr id="2" name="Rectangle 1"/>
@@ -10679,6 +10910,7 @@
           <a:lstStyle/>
           <a:p>
             <a:pPr algn="ctr"/>
+            <a:endParaRPr/>
           </a:p>
         </p:txBody>
       </p:sp>
@@ -10895,7 +11127,7 @@
 </file>
 
 <file path=ppt/slides/slide5.xml><?xml version="1.0" encoding="utf-8"?>
-<p:sld xmlns:a="http://schemas.openxmlformats.org/drawingml/2006/main" xmlns:p="http://schemas.openxmlformats.org/presentationml/2006/main" xmlns:r="http://schemas.openxmlformats.org/officeDocument/2006/relationships">
+<p:sld xmlns:a="http://schemas.openxmlformats.org/drawingml/2006/main" xmlns:r="http://schemas.openxmlformats.org/officeDocument/2006/relationships" xmlns:p="http://schemas.openxmlformats.org/presentationml/2006/main">
   <p:cSld>
     <p:bg>
       <p:bgPr>
@@ -10911,7 +11143,14 @@
         <p:cNvGrpSpPr/>
         <p:nvPr/>
       </p:nvGrpSpPr>
-      <p:grpSpPr/>
+      <p:grpSpPr>
+        <a:xfrm>
+          <a:off x="0" y="0"/>
+          <a:ext cx="0" cy="0"/>
+          <a:chOff x="0" y="0"/>
+          <a:chExt cx="0" cy="0"/>
+        </a:xfrm>
+      </p:grpSpPr>
       <p:sp>
         <p:nvSpPr>
           <p:cNvPr id="2" name="Rectangle 1"/>
@@ -10952,6 +11191,7 @@
           <a:lstStyle/>
           <a:p>
             <a:pPr algn="ctr"/>
+            <a:endParaRPr/>
           </a:p>
         </p:txBody>
       </p:sp>
@@ -11168,7 +11408,7 @@
 </file>
 
 <file path=ppt/slides/slide6.xml><?xml version="1.0" encoding="utf-8"?>
-<p:sld xmlns:a="http://schemas.openxmlformats.org/drawingml/2006/main" xmlns:p="http://schemas.openxmlformats.org/presentationml/2006/main" xmlns:r="http://schemas.openxmlformats.org/officeDocument/2006/relationships">
+<p:sld xmlns:a="http://schemas.openxmlformats.org/drawingml/2006/main" xmlns:r="http://schemas.openxmlformats.org/officeDocument/2006/relationships" xmlns:p="http://schemas.openxmlformats.org/presentationml/2006/main">
   <p:cSld>
     <p:bg>
       <p:bgPr>
@@ -11184,7 +11424,14 @@
         <p:cNvGrpSpPr/>
         <p:nvPr/>
       </p:nvGrpSpPr>
-      <p:grpSpPr/>
+      <p:grpSpPr>
+        <a:xfrm>
+          <a:off x="0" y="0"/>
+          <a:ext cx="0" cy="0"/>
+          <a:chOff x="0" y="0"/>
+          <a:chExt cx="0" cy="0"/>
+        </a:xfrm>
+      </p:grpSpPr>
       <p:sp>
         <p:nvSpPr>
           <p:cNvPr id="2" name="Rectangle 1"/>
@@ -11225,6 +11472,7 @@
           <a:lstStyle/>
           <a:p>
             <a:pPr algn="ctr"/>
+            <a:endParaRPr/>
           </a:p>
         </p:txBody>
       </p:sp>
@@ -11405,7 +11653,7 @@
 </file>
 
 <file path=ppt/slides/slide7.xml><?xml version="1.0" encoding="utf-8"?>
-<p:sld xmlns:a="http://schemas.openxmlformats.org/drawingml/2006/main" xmlns:p="http://schemas.openxmlformats.org/presentationml/2006/main" xmlns:r="http://schemas.openxmlformats.org/officeDocument/2006/relationships">
+<p:sld xmlns:a="http://schemas.openxmlformats.org/drawingml/2006/main" xmlns:r="http://schemas.openxmlformats.org/officeDocument/2006/relationships" xmlns:p="http://schemas.openxmlformats.org/presentationml/2006/main">
   <p:cSld>
     <p:bg>
       <p:bgPr>
@@ -11421,7 +11669,14 @@
         <p:cNvGrpSpPr/>
         <p:nvPr/>
       </p:nvGrpSpPr>
-      <p:grpSpPr/>
+      <p:grpSpPr>
+        <a:xfrm>
+          <a:off x="0" y="0"/>
+          <a:ext cx="0" cy="0"/>
+          <a:chOff x="0" y="0"/>
+          <a:chExt cx="0" cy="0"/>
+        </a:xfrm>
+      </p:grpSpPr>
       <p:sp>
         <p:nvSpPr>
           <p:cNvPr id="2" name="Rectangle 1"/>
@@ -11462,6 +11717,7 @@
           <a:lstStyle/>
           <a:p>
             <a:pPr algn="ctr"/>
+            <a:endParaRPr/>
           </a:p>
         </p:txBody>
       </p:sp>
@@ -11678,7 +11934,7 @@
 </file>
 
 <file path=ppt/slides/slide8.xml><?xml version="1.0" encoding="utf-8"?>
-<p:sld xmlns:a="http://schemas.openxmlformats.org/drawingml/2006/main" xmlns:p="http://schemas.openxmlformats.org/presentationml/2006/main" xmlns:r="http://schemas.openxmlformats.org/officeDocument/2006/relationships">
+<p:sld xmlns:a="http://schemas.openxmlformats.org/drawingml/2006/main" xmlns:r="http://schemas.openxmlformats.org/officeDocument/2006/relationships" xmlns:p="http://schemas.openxmlformats.org/presentationml/2006/main">
   <p:cSld>
     <p:bg>
       <p:bgPr>
@@ -11694,7 +11950,14 @@
         <p:cNvGrpSpPr/>
         <p:nvPr/>
       </p:nvGrpSpPr>
-      <p:grpSpPr/>
+      <p:grpSpPr>
+        <a:xfrm>
+          <a:off x="0" y="0"/>
+          <a:ext cx="0" cy="0"/>
+          <a:chOff x="0" y="0"/>
+          <a:chExt cx="0" cy="0"/>
+        </a:xfrm>
+      </p:grpSpPr>
       <p:sp>
         <p:nvSpPr>
           <p:cNvPr id="2" name="Rectangle 1"/>
@@ -11735,6 +11998,7 @@
           <a:lstStyle/>
           <a:p>
             <a:pPr algn="ctr"/>
+            <a:endParaRPr/>
           </a:p>
         </p:txBody>
       </p:sp>
@@ -11915,7 +12179,7 @@
 </file>
 
 <file path=ppt/slides/slide9.xml><?xml version="1.0" encoding="utf-8"?>
-<p:sld xmlns:a="http://schemas.openxmlformats.org/drawingml/2006/main" xmlns:p="http://schemas.openxmlformats.org/presentationml/2006/main" xmlns:r="http://schemas.openxmlformats.org/officeDocument/2006/relationships">
+<p:sld xmlns:a="http://schemas.openxmlformats.org/drawingml/2006/main" xmlns:r="http://schemas.openxmlformats.org/officeDocument/2006/relationships" xmlns:p="http://schemas.openxmlformats.org/presentationml/2006/main">
   <p:cSld>
     <p:bg>
       <p:bgPr>
@@ -11931,7 +12195,14 @@
         <p:cNvGrpSpPr/>
         <p:nvPr/>
       </p:nvGrpSpPr>
-      <p:grpSpPr/>
+      <p:grpSpPr>
+        <a:xfrm>
+          <a:off x="0" y="0"/>
+          <a:ext cx="0" cy="0"/>
+          <a:chOff x="0" y="0"/>
+          <a:chExt cx="0" cy="0"/>
+        </a:xfrm>
+      </p:grpSpPr>
       <p:sp>
         <p:nvSpPr>
           <p:cNvPr id="2" name="Rectangle 1"/>
@@ -11972,6 +12243,7 @@
           <a:lstStyle/>
           <a:p>
             <a:pPr algn="ctr"/>
+            <a:endParaRPr/>
           </a:p>
         </p:txBody>
       </p:sp>
